--- a/kvcache/unified_kv_memory/kvcache _srs.pptx
+++ b/kvcache/unified_kv_memory/kvcache _srs.pptx
@@ -19,7 +19,9 @@
     <p:sldId id="265" r:id="rId13"/>
     <p:sldId id="266" r:id="rId14"/>
     <p:sldId id="271" r:id="rId15"/>
-    <p:sldId id="272" r:id="rId16"/>
+    <p:sldId id="273" r:id="rId16"/>
+    <p:sldId id="274" r:id="rId17"/>
+    <p:sldId id="272" r:id="rId18"/>
   </p:sldIdLst>
   <p:sldSz cx="12192000" cy="6858000"/>
   <p:notesSz cx="6858000" cy="9144000"/>
@@ -145,6 +147,8 @@
             <p14:sldId id="265"/>
             <p14:sldId id="266"/>
             <p14:sldId id="271"/>
+            <p14:sldId id="273"/>
+            <p14:sldId id="274"/>
           </p14:sldIdLst>
         </p14:section>
         <p14:section name="无标题节" id="{337223D9-5D91-4B89-A3E5-0F8CA8CB9962}">
@@ -292,7 +296,7 @@
           <a:p>
             <a:fld id="{1177E29E-2E47-4D39-92B9-30D04CD90134}" type="datetimeFigureOut">
               <a:rPr lang="zh-CN" altLang="en-US" smtClean="0"/>
-              <a:t>2026/6/28</a:t>
+              <a:t>2026/7/3</a:t>
             </a:fld>
             <a:endParaRPr lang="zh-CN" altLang="en-US"/>
           </a:p>
@@ -462,7 +466,7 @@
           <a:p>
             <a:fld id="{1177E29E-2E47-4D39-92B9-30D04CD90134}" type="datetimeFigureOut">
               <a:rPr lang="zh-CN" altLang="en-US" smtClean="0"/>
-              <a:t>2026/6/28</a:t>
+              <a:t>2026/7/3</a:t>
             </a:fld>
             <a:endParaRPr lang="zh-CN" altLang="en-US"/>
           </a:p>
@@ -642,7 +646,7 @@
           <a:p>
             <a:fld id="{1177E29E-2E47-4D39-92B9-30D04CD90134}" type="datetimeFigureOut">
               <a:rPr lang="zh-CN" altLang="en-US" smtClean="0"/>
-              <a:t>2026/6/28</a:t>
+              <a:t>2026/7/3</a:t>
             </a:fld>
             <a:endParaRPr lang="zh-CN" altLang="en-US"/>
           </a:p>
@@ -812,7 +816,7 @@
           <a:p>
             <a:fld id="{1177E29E-2E47-4D39-92B9-30D04CD90134}" type="datetimeFigureOut">
               <a:rPr lang="zh-CN" altLang="en-US" smtClean="0"/>
-              <a:t>2026/6/28</a:t>
+              <a:t>2026/7/3</a:t>
             </a:fld>
             <a:endParaRPr lang="zh-CN" altLang="en-US"/>
           </a:p>
@@ -1058,7 +1062,7 @@
           <a:p>
             <a:fld id="{1177E29E-2E47-4D39-92B9-30D04CD90134}" type="datetimeFigureOut">
               <a:rPr lang="zh-CN" altLang="en-US" smtClean="0"/>
-              <a:t>2026/6/28</a:t>
+              <a:t>2026/7/3</a:t>
             </a:fld>
             <a:endParaRPr lang="zh-CN" altLang="en-US"/>
           </a:p>
@@ -1290,7 +1294,7 @@
           <a:p>
             <a:fld id="{1177E29E-2E47-4D39-92B9-30D04CD90134}" type="datetimeFigureOut">
               <a:rPr lang="zh-CN" altLang="en-US" smtClean="0"/>
-              <a:t>2026/6/28</a:t>
+              <a:t>2026/7/3</a:t>
             </a:fld>
             <a:endParaRPr lang="zh-CN" altLang="en-US"/>
           </a:p>
@@ -1657,7 +1661,7 @@
           <a:p>
             <a:fld id="{1177E29E-2E47-4D39-92B9-30D04CD90134}" type="datetimeFigureOut">
               <a:rPr lang="zh-CN" altLang="en-US" smtClean="0"/>
-              <a:t>2026/6/28</a:t>
+              <a:t>2026/7/3</a:t>
             </a:fld>
             <a:endParaRPr lang="zh-CN" altLang="en-US"/>
           </a:p>
@@ -1775,7 +1779,7 @@
           <a:p>
             <a:fld id="{1177E29E-2E47-4D39-92B9-30D04CD90134}" type="datetimeFigureOut">
               <a:rPr lang="zh-CN" altLang="en-US" smtClean="0"/>
-              <a:t>2026/6/28</a:t>
+              <a:t>2026/7/3</a:t>
             </a:fld>
             <a:endParaRPr lang="zh-CN" altLang="en-US"/>
           </a:p>
@@ -1870,7 +1874,7 @@
           <a:p>
             <a:fld id="{1177E29E-2E47-4D39-92B9-30D04CD90134}" type="datetimeFigureOut">
               <a:rPr lang="zh-CN" altLang="en-US" smtClean="0"/>
-              <a:t>2026/6/28</a:t>
+              <a:t>2026/7/3</a:t>
             </a:fld>
             <a:endParaRPr lang="zh-CN" altLang="en-US"/>
           </a:p>
@@ -2147,7 +2151,7 @@
           <a:p>
             <a:fld id="{1177E29E-2E47-4D39-92B9-30D04CD90134}" type="datetimeFigureOut">
               <a:rPr lang="zh-CN" altLang="en-US" smtClean="0"/>
-              <a:t>2026/6/28</a:t>
+              <a:t>2026/7/3</a:t>
             </a:fld>
             <a:endParaRPr lang="zh-CN" altLang="en-US"/>
           </a:p>
@@ -2400,7 +2404,7 @@
           <a:p>
             <a:fld id="{1177E29E-2E47-4D39-92B9-30D04CD90134}" type="datetimeFigureOut">
               <a:rPr lang="zh-CN" altLang="en-US" smtClean="0"/>
-              <a:t>2026/6/28</a:t>
+              <a:t>2026/7/3</a:t>
             </a:fld>
             <a:endParaRPr lang="zh-CN" altLang="en-US"/>
           </a:p>
@@ -2613,7 +2617,7 @@
           <a:p>
             <a:fld id="{1177E29E-2E47-4D39-92B9-30D04CD90134}" type="datetimeFigureOut">
               <a:rPr lang="zh-CN" altLang="en-US" smtClean="0"/>
-              <a:t>2026/6/28</a:t>
+              <a:t>2026/7/3</a:t>
             </a:fld>
             <a:endParaRPr lang="zh-CN" altLang="en-US"/>
           </a:p>
@@ -3116,7 +3120,6 @@
               <a:rPr lang="zh-CN" altLang="en-US" sz="3200" dirty="0"/>
               <a:t>底层传输层</a:t>
             </a:r>
-            <a:endParaRPr lang="zh-CN" altLang="en-US" sz="3200" dirty="0"/>
           </a:p>
         </p:txBody>
       </p:sp>
@@ -6541,10 +6544,6 @@
               </a:rPr>
               <a:t>传输管理层</a:t>
             </a:r>
-            <a:endParaRPr lang="zh-CN" altLang="en-US" sz="3200" dirty="0">
-              <a:latin typeface="+mn-ea"/>
-              <a:ea typeface="+mn-ea"/>
-            </a:endParaRPr>
           </a:p>
         </p:txBody>
       </p:sp>
@@ -8478,15 +8477,7 @@
                           <a:latin typeface="+mn-ea"/>
                           <a:ea typeface="+mn-ea"/>
                         </a:rPr>
-                        <a:t> </a:t>
-                      </a:r>
-                      <a:r>
-                        <a:rPr lang="en-US" sz="1200" dirty="0" smtClean="0">
-                          <a:effectLst/>
-                          <a:latin typeface="+mn-ea"/>
-                          <a:ea typeface="+mn-ea"/>
-                        </a:rPr>
-                        <a:t>RDMA/UB</a:t>
+                        <a:t> RDMA/UB</a:t>
                       </a:r>
                       <a:endParaRPr lang="zh-CN" sz="1200" dirty="0">
                         <a:effectLst/>
@@ -9185,15 +9176,7 @@
                           <a:latin typeface="+mn-ea"/>
                           <a:ea typeface="+mn-ea"/>
                         </a:rPr>
-                        <a:t> </a:t>
-                      </a:r>
-                      <a:r>
-                        <a:rPr lang="en-US" sz="1200" dirty="0" smtClean="0">
-                          <a:effectLst/>
-                          <a:latin typeface="+mn-ea"/>
-                          <a:ea typeface="+mn-ea"/>
-                        </a:rPr>
-                        <a:t>NPU/CPU/SSD</a:t>
+                        <a:t> NPU/CPU/SSD</a:t>
                       </a:r>
                       <a:endParaRPr lang="zh-CN" sz="1200" dirty="0">
                         <a:effectLst/>
@@ -9260,15 +9243,7 @@
                           <a:latin typeface="+mn-ea"/>
                           <a:ea typeface="+mn-ea"/>
                         </a:rPr>
-                        <a:t>! </a:t>
-                      </a:r>
-                      <a:r>
-                        <a:rPr lang="en-US" sz="1200" dirty="0" smtClean="0">
-                          <a:effectLst/>
-                          <a:latin typeface="+mn-ea"/>
-                          <a:ea typeface="+mn-ea"/>
-                        </a:rPr>
-                        <a:t>NPU/CPU</a:t>
+                        <a:t>! NPU/CPU</a:t>
                       </a:r>
                       <a:r>
                         <a:rPr lang="zh-CN" sz="1200" dirty="0">
@@ -9347,15 +9322,7 @@
                           <a:latin typeface="+mn-ea"/>
                           <a:ea typeface="+mn-ea"/>
                         </a:rPr>
-                        <a:t> </a:t>
-                      </a:r>
-                      <a:r>
-                        <a:rPr lang="en-US" sz="1200" dirty="0" smtClean="0">
-                          <a:effectLst/>
-                          <a:latin typeface="+mn-ea"/>
-                          <a:ea typeface="+mn-ea"/>
-                        </a:rPr>
-                        <a:t>NPU/CPU/SSD</a:t>
+                        <a:t> NPU/CPU/SSD</a:t>
                       </a:r>
                       <a:endParaRPr lang="zh-CN" sz="1200" dirty="0">
                         <a:effectLst/>
@@ -10694,10 +10661,6 @@
               </a:rPr>
               <a:t>对接层</a:t>
             </a:r>
-            <a:endParaRPr lang="zh-CN" altLang="en-US" sz="3200" dirty="0">
-              <a:latin typeface="+mn-ea"/>
-              <a:ea typeface="+mn-ea"/>
-            </a:endParaRPr>
           </a:p>
         </p:txBody>
       </p:sp>
@@ -13111,10 +13074,6 @@
               </a:rPr>
               <a:t>协同场景与关键指标深度推演</a:t>
             </a:r>
-            <a:endParaRPr lang="zh-CN" altLang="en-US" sz="3200" dirty="0">
-              <a:latin typeface="+mn-ea"/>
-              <a:ea typeface="+mn-ea"/>
-            </a:endParaRPr>
           </a:p>
         </p:txBody>
       </p:sp>
@@ -16581,6 +16540,469 @@
 </file>
 
 <file path=ppt/slides/slide15.xml><?xml version="1.0" encoding="utf-8"?>
+<p:sld xmlns:a="http://schemas.openxmlformats.org/drawingml/2006/main" xmlns:r="http://schemas.openxmlformats.org/officeDocument/2006/relationships" xmlns:p="http://schemas.openxmlformats.org/presentationml/2006/main">
+  <p:cSld>
+    <p:spTree>
+      <p:nvGrpSpPr>
+        <p:cNvPr id="1" name=""/>
+        <p:cNvGrpSpPr/>
+        <p:nvPr/>
+      </p:nvGrpSpPr>
+      <p:grpSpPr>
+        <a:xfrm>
+          <a:off x="0" y="0"/>
+          <a:ext cx="0" cy="0"/>
+          <a:chOff x="0" y="0"/>
+          <a:chExt cx="0" cy="0"/>
+        </a:xfrm>
+      </p:grpSpPr>
+      <p:sp>
+        <p:nvSpPr>
+          <p:cNvPr id="2" name="标题 1"/>
+          <p:cNvSpPr>
+            <a:spLocks noGrp="1"/>
+          </p:cNvSpPr>
+          <p:nvPr>
+            <p:ph type="title"/>
+          </p:nvPr>
+        </p:nvSpPr>
+        <p:spPr/>
+        <p:txBody>
+          <a:bodyPr/>
+          <a:lstStyle/>
+          <a:p>
+            <a:endParaRPr lang="zh-CN" altLang="en-US"/>
+          </a:p>
+        </p:txBody>
+      </p:sp>
+      <p:sp>
+        <p:nvSpPr>
+          <p:cNvPr id="3" name="内容占位符 2"/>
+          <p:cNvSpPr>
+            <a:spLocks noGrp="1"/>
+          </p:cNvSpPr>
+          <p:nvPr>
+            <p:ph idx="1"/>
+          </p:nvPr>
+        </p:nvSpPr>
+        <p:spPr/>
+        <p:txBody>
+          <a:bodyPr>
+            <a:normAutofit fontScale="92500" lnSpcReduction="20000"/>
+          </a:bodyPr>
+          <a:lstStyle/>
+          <a:p>
+            <a:r>
+              <a:rPr lang="zh-CN" altLang="en-US" dirty="0"/>
+              <a:t>按照第一性原理，</a:t>
+            </a:r>
+            <a:r>
+              <a:rPr lang="en-US" altLang="zh-CN" dirty="0" err="1"/>
+              <a:t>KVCache</a:t>
+            </a:r>
+            <a:r>
+              <a:rPr lang="en-US" altLang="zh-CN" dirty="0"/>
+              <a:t> </a:t>
+            </a:r>
+            <a:r>
+              <a:rPr lang="zh-CN" altLang="en-US" dirty="0"/>
+              <a:t>软件系统必须完成 </a:t>
+            </a:r>
+            <a:r>
+              <a:rPr lang="en-US" altLang="zh-CN" dirty="0"/>
+              <a:t>9 </a:t>
+            </a:r>
+            <a:r>
+              <a:rPr lang="zh-CN" altLang="en-US" dirty="0"/>
+              <a:t>件事：</a:t>
+            </a:r>
+          </a:p>
+          <a:p>
+            <a:r>
+              <a:rPr lang="zh-CN" altLang="en-US" dirty="0"/>
+              <a:t>生成 </a:t>
+            </a:r>
+            <a:r>
+              <a:rPr lang="en-US" altLang="zh-CN" dirty="0"/>
+              <a:t>KV</a:t>
+            </a:r>
+            <a:r>
+              <a:rPr lang="zh-CN" altLang="en-US" dirty="0"/>
+              <a:t>； </a:t>
+            </a:r>
+          </a:p>
+          <a:p>
+            <a:r>
+              <a:rPr lang="zh-CN" altLang="en-US" dirty="0"/>
+              <a:t>标识 </a:t>
+            </a:r>
+            <a:r>
+              <a:rPr lang="en-US" altLang="zh-CN" dirty="0"/>
+              <a:t>KV</a:t>
+            </a:r>
+            <a:r>
+              <a:rPr lang="zh-CN" altLang="en-US" dirty="0"/>
+              <a:t>； </a:t>
+            </a:r>
+          </a:p>
+          <a:p>
+            <a:r>
+              <a:rPr lang="zh-CN" altLang="en-US" dirty="0"/>
+              <a:t>存放 </a:t>
+            </a:r>
+            <a:r>
+              <a:rPr lang="en-US" altLang="zh-CN" dirty="0"/>
+              <a:t>KV</a:t>
+            </a:r>
+            <a:r>
+              <a:rPr lang="zh-CN" altLang="en-US" dirty="0"/>
+              <a:t>； </a:t>
+            </a:r>
+          </a:p>
+          <a:p>
+            <a:r>
+              <a:rPr lang="zh-CN" altLang="en-US" dirty="0"/>
+              <a:t>查找 </a:t>
+            </a:r>
+            <a:r>
+              <a:rPr lang="en-US" altLang="zh-CN" dirty="0"/>
+              <a:t>KV</a:t>
+            </a:r>
+            <a:r>
+              <a:rPr lang="zh-CN" altLang="en-US" dirty="0"/>
+              <a:t>； </a:t>
+            </a:r>
+          </a:p>
+          <a:p>
+            <a:r>
+              <a:rPr lang="zh-CN" altLang="en-US" dirty="0"/>
+              <a:t>移动 </a:t>
+            </a:r>
+            <a:r>
+              <a:rPr lang="en-US" altLang="zh-CN" dirty="0"/>
+              <a:t>KV</a:t>
+            </a:r>
+            <a:r>
+              <a:rPr lang="zh-CN" altLang="en-US" dirty="0"/>
+              <a:t>； </a:t>
+            </a:r>
+          </a:p>
+          <a:p>
+            <a:r>
+              <a:rPr lang="zh-CN" altLang="en-US" dirty="0"/>
+              <a:t>消费 </a:t>
+            </a:r>
+            <a:r>
+              <a:rPr lang="en-US" altLang="zh-CN" dirty="0"/>
+              <a:t>/ attach KV</a:t>
+            </a:r>
+            <a:r>
+              <a:rPr lang="zh-CN" altLang="en-US" dirty="0"/>
+              <a:t>； </a:t>
+            </a:r>
+          </a:p>
+          <a:p>
+            <a:r>
+              <a:rPr lang="zh-CN" altLang="en-US" dirty="0"/>
+              <a:t>共享 </a:t>
+            </a:r>
+            <a:r>
+              <a:rPr lang="en-US" altLang="zh-CN" dirty="0"/>
+              <a:t>KV</a:t>
+            </a:r>
+            <a:r>
+              <a:rPr lang="zh-CN" altLang="en-US" dirty="0"/>
+              <a:t>； </a:t>
+            </a:r>
+          </a:p>
+          <a:p>
+            <a:r>
+              <a:rPr lang="zh-CN" altLang="en-US" dirty="0"/>
+              <a:t>回收 </a:t>
+            </a:r>
+            <a:r>
+              <a:rPr lang="en-US" altLang="zh-CN" dirty="0"/>
+              <a:t>KV</a:t>
+            </a:r>
+            <a:r>
+              <a:rPr lang="zh-CN" altLang="en-US" dirty="0"/>
+              <a:t>； </a:t>
+            </a:r>
+          </a:p>
+          <a:p>
+            <a:r>
+              <a:rPr lang="zh-CN" altLang="en-US" dirty="0"/>
+              <a:t>管控、观测、升级 </a:t>
+            </a:r>
+            <a:r>
+              <a:rPr lang="en-US" altLang="zh-CN" dirty="0"/>
+              <a:t>KV </a:t>
+            </a:r>
+            <a:r>
+              <a:rPr lang="zh-CN" altLang="en-US" dirty="0"/>
+              <a:t>系统。</a:t>
+            </a:r>
+          </a:p>
+        </p:txBody>
+      </p:sp>
+    </p:spTree>
+    <p:extLst>
+      <p:ext uri="{BB962C8B-B14F-4D97-AF65-F5344CB8AC3E}">
+        <p14:creationId xmlns:p14="http://schemas.microsoft.com/office/powerpoint/2010/main" val="3032918758"/>
+      </p:ext>
+    </p:extLst>
+  </p:cSld>
+  <p:clrMapOvr>
+    <a:masterClrMapping/>
+  </p:clrMapOvr>
+</p:sld>
+</file>
+
+<file path=ppt/slides/slide16.xml><?xml version="1.0" encoding="utf-8"?>
+<p:sld xmlns:a="http://schemas.openxmlformats.org/drawingml/2006/main" xmlns:r="http://schemas.openxmlformats.org/officeDocument/2006/relationships" xmlns:p="http://schemas.openxmlformats.org/presentationml/2006/main">
+  <p:cSld>
+    <p:spTree>
+      <p:nvGrpSpPr>
+        <p:cNvPr id="1" name=""/>
+        <p:cNvGrpSpPr/>
+        <p:nvPr/>
+      </p:nvGrpSpPr>
+      <p:grpSpPr>
+        <a:xfrm>
+          <a:off x="0" y="0"/>
+          <a:ext cx="0" cy="0"/>
+          <a:chOff x="0" y="0"/>
+          <a:chExt cx="0" cy="0"/>
+        </a:xfrm>
+      </p:grpSpPr>
+      <p:sp>
+        <p:nvSpPr>
+          <p:cNvPr id="2" name="标题 1"/>
+          <p:cNvSpPr>
+            <a:spLocks noGrp="1"/>
+          </p:cNvSpPr>
+          <p:nvPr>
+            <p:ph type="title"/>
+          </p:nvPr>
+        </p:nvSpPr>
+        <p:spPr/>
+        <p:txBody>
+          <a:bodyPr/>
+          <a:lstStyle/>
+          <a:p>
+            <a:endParaRPr lang="zh-CN" altLang="en-US"/>
+          </a:p>
+        </p:txBody>
+      </p:sp>
+      <p:sp>
+        <p:nvSpPr>
+          <p:cNvPr id="3" name="内容占位符 2"/>
+          <p:cNvSpPr>
+            <a:spLocks noGrp="1"/>
+          </p:cNvSpPr>
+          <p:nvPr>
+            <p:ph idx="1"/>
+          </p:nvPr>
+        </p:nvSpPr>
+        <p:spPr/>
+        <p:txBody>
+          <a:bodyPr>
+            <a:normAutofit fontScale="55000" lnSpcReduction="20000"/>
+          </a:bodyPr>
+          <a:lstStyle/>
+          <a:p>
+            <a:r>
+              <a:rPr lang="zh-CN" altLang="en-US" dirty="0"/>
+              <a:t>但这些还不够形成完整的 </a:t>
+            </a:r>
+            <a:r>
+              <a:rPr lang="en-US" altLang="zh-CN" b="1" dirty="0"/>
+              <a:t>KV identity service</a:t>
+            </a:r>
+            <a:r>
+              <a:rPr lang="zh-CN" altLang="en-US" dirty="0"/>
+              <a:t>。</a:t>
+            </a:r>
+          </a:p>
+          <a:p>
+            <a:r>
+              <a:rPr lang="en-US" altLang="zh-CN" dirty="0" err="1"/>
+              <a:t>KVCache</a:t>
+            </a:r>
+            <a:r>
+              <a:rPr lang="en-US" altLang="zh-CN" dirty="0"/>
+              <a:t> </a:t>
+            </a:r>
+            <a:r>
+              <a:rPr lang="zh-CN" altLang="en-US" dirty="0"/>
+              <a:t>不是普通 </a:t>
+            </a:r>
+            <a:r>
+              <a:rPr lang="en-US" altLang="zh-CN" dirty="0"/>
+              <a:t>key-value bytes</a:t>
+            </a:r>
+            <a:r>
+              <a:rPr lang="zh-CN" altLang="en-US" dirty="0"/>
+              <a:t>。它能否复用，至少取决于：</a:t>
+            </a:r>
+          </a:p>
+          <a:p>
+            <a:r>
+              <a:rPr lang="en-US" altLang="zh-CN" dirty="0"/>
+              <a:t>model id</a:t>
+            </a:r>
+            <a:r>
+              <a:rPr lang="zh-CN" altLang="en-US" dirty="0"/>
+              <a:t>； </a:t>
+            </a:r>
+          </a:p>
+          <a:p>
+            <a:r>
+              <a:rPr lang="en-US" altLang="zh-CN" dirty="0"/>
+              <a:t>model weights version</a:t>
+            </a:r>
+            <a:r>
+              <a:rPr lang="zh-CN" altLang="en-US" dirty="0"/>
+              <a:t>； </a:t>
+            </a:r>
+          </a:p>
+          <a:p>
+            <a:r>
+              <a:rPr lang="en-US" altLang="zh-CN" dirty="0"/>
+              <a:t>tokenizer hash</a:t>
+            </a:r>
+            <a:r>
+              <a:rPr lang="zh-CN" altLang="en-US" dirty="0"/>
+              <a:t>； </a:t>
+            </a:r>
+          </a:p>
+          <a:p>
+            <a:r>
+              <a:rPr lang="en-US" altLang="zh-CN" dirty="0"/>
+              <a:t>chat template version</a:t>
+            </a:r>
+            <a:r>
+              <a:rPr lang="zh-CN" altLang="en-US" dirty="0"/>
+              <a:t>； </a:t>
+            </a:r>
+          </a:p>
+          <a:p>
+            <a:r>
+              <a:rPr lang="en-US" altLang="zh-CN" dirty="0"/>
+              <a:t>system prompt rendering</a:t>
+            </a:r>
+            <a:r>
+              <a:rPr lang="zh-CN" altLang="en-US" dirty="0"/>
+              <a:t>； </a:t>
+            </a:r>
+          </a:p>
+          <a:p>
+            <a:r>
+              <a:rPr lang="en-US" altLang="zh-CN" dirty="0" err="1"/>
+              <a:t>LoRA</a:t>
+            </a:r>
+            <a:r>
+              <a:rPr lang="en-US" altLang="zh-CN" dirty="0"/>
+              <a:t> / adapter</a:t>
+            </a:r>
+            <a:r>
+              <a:rPr lang="zh-CN" altLang="en-US" dirty="0"/>
+              <a:t>； </a:t>
+            </a:r>
+          </a:p>
+          <a:p>
+            <a:r>
+              <a:rPr lang="en-US" altLang="zh-CN" dirty="0"/>
+              <a:t>multimodal input hash</a:t>
+            </a:r>
+            <a:r>
+              <a:rPr lang="zh-CN" altLang="en-US" dirty="0"/>
+              <a:t>； </a:t>
+            </a:r>
+          </a:p>
+          <a:p>
+            <a:r>
+              <a:rPr lang="en-US" altLang="zh-CN" dirty="0"/>
+              <a:t>TP/PP/rank slice</a:t>
+            </a:r>
+            <a:r>
+              <a:rPr lang="zh-CN" altLang="en-US" dirty="0"/>
+              <a:t>； </a:t>
+            </a:r>
+          </a:p>
+          <a:p>
+            <a:r>
+              <a:rPr lang="en-US" altLang="zh-CN" dirty="0" err="1"/>
+              <a:t>dtype</a:t>
+            </a:r>
+            <a:r>
+              <a:rPr lang="zh-CN" altLang="en-US" dirty="0"/>
+              <a:t>； </a:t>
+            </a:r>
+          </a:p>
+          <a:p>
+            <a:r>
+              <a:rPr lang="en-US" altLang="zh-CN" dirty="0"/>
+              <a:t>KV layout</a:t>
+            </a:r>
+            <a:r>
+              <a:rPr lang="zh-CN" altLang="en-US" dirty="0"/>
+              <a:t>； </a:t>
+            </a:r>
+          </a:p>
+          <a:p>
+            <a:r>
+              <a:rPr lang="en-US" altLang="zh-CN" dirty="0" err="1"/>
+              <a:t>RoPE</a:t>
+            </a:r>
+            <a:r>
+              <a:rPr lang="en-US" altLang="zh-CN" dirty="0"/>
+              <a:t>/position policy</a:t>
+            </a:r>
+            <a:r>
+              <a:rPr lang="zh-CN" altLang="en-US" dirty="0"/>
+              <a:t>； </a:t>
+            </a:r>
+          </a:p>
+          <a:p>
+            <a:r>
+              <a:rPr lang="en-US" altLang="zh-CN" dirty="0"/>
+              <a:t>attention mask/sliding window policy</a:t>
+            </a:r>
+            <a:r>
+              <a:rPr lang="zh-CN" altLang="en-US" dirty="0"/>
+              <a:t>； </a:t>
+            </a:r>
+          </a:p>
+          <a:p>
+            <a:r>
+              <a:rPr lang="en-US" altLang="zh-CN" dirty="0"/>
+              <a:t>cache salt / tenant domain</a:t>
+            </a:r>
+            <a:r>
+              <a:rPr lang="zh-CN" altLang="en-US" dirty="0"/>
+              <a:t>。</a:t>
+            </a:r>
+          </a:p>
+          <a:p>
+            <a:endParaRPr lang="zh-CN" altLang="en-US" dirty="0"/>
+          </a:p>
+        </p:txBody>
+      </p:sp>
+    </p:spTree>
+    <p:extLst>
+      <p:ext uri="{BB962C8B-B14F-4D97-AF65-F5344CB8AC3E}">
+        <p14:creationId xmlns:p14="http://schemas.microsoft.com/office/powerpoint/2010/main" val="590277866"/>
+      </p:ext>
+    </p:extLst>
+  </p:cSld>
+  <p:clrMapOvr>
+    <a:masterClrMapping/>
+  </p:clrMapOvr>
+</p:sld>
+</file>
+
+<file path=ppt/slides/slide17.xml><?xml version="1.0" encoding="utf-8"?>
 <p:sld xmlns:a="http://schemas.openxmlformats.org/drawingml/2006/main" xmlns:r="http://schemas.openxmlformats.org/officeDocument/2006/relationships" xmlns:p="http://schemas.openxmlformats.org/presentationml/2006/main">
   <p:cSld>
     <p:spTree>
@@ -26415,10 +26837,6 @@
               </a:rPr>
               <a:t>业务指标的影响</a:t>
             </a:r>
-            <a:endParaRPr lang="zh-CN" altLang="en-US" sz="3200" dirty="0">
-              <a:latin typeface="+mn-ea"/>
-              <a:ea typeface="+mn-ea"/>
-            </a:endParaRPr>
           </a:p>
         </p:txBody>
       </p:sp>
@@ -30748,7 +31166,6 @@
               <a:rPr lang="zh-CN" altLang="en-US" sz="3200" dirty="0"/>
               <a:t>内存管理架构设计</a:t>
             </a:r>
-            <a:endParaRPr lang="zh-CN" altLang="en-US" sz="3200" dirty="0"/>
           </a:p>
         </p:txBody>
       </p:sp>
@@ -33043,7 +33460,6 @@
               <a:rPr lang="zh-CN" altLang="en-US" sz="3200" dirty="0"/>
               <a:t>池核心设计原则</a:t>
             </a:r>
-            <a:endParaRPr lang="zh-CN" altLang="en-US" sz="3200" dirty="0"/>
           </a:p>
         </p:txBody>
       </p:sp>
